--- a/можно выслать студентам/2 модуль/2.4теория.pptx
+++ b/можно выслать студентам/2 модуль/2.4теория.pptx
@@ -25,14 +25,15 @@
     <p:embeddedFont>
       <p:font typeface="Nunito Sans" pitchFamily="2" charset="-52"/>
       <p:regular r:id="rId13"/>
+      <p:italic r:id="rId14"/>
     </p:embeddedFont>
     <p:embeddedFont>
       <p:font typeface="Nunito Sans Bold" charset="-52"/>
-      <p:regular r:id="rId14"/>
+      <p:regular r:id="rId15"/>
     </p:embeddedFont>
     <p:embeddedFont>
       <p:font typeface="Nunito Sans Light" pitchFamily="2" charset="-52"/>
-      <p:regular r:id="rId15"/>
+      <p:regular r:id="rId16"/>
     </p:embeddedFont>
   </p:embeddedFontLst>
   <p:defaultTextStyle>
